--- a/docs/隐盾安全智能体_预答辩.pptx
+++ b/docs/隐盾安全智能体_预答辩.pptx
@@ -4379,7 +4379,7 @@
                 </a:solidFill>
                 <a:latin typeface="Microsoft YaHei"/>
               </a:rPr>
-              <a:t>V3.6.19</a:t>
+              <a:t>V3.6.20</a:t>
             </a:r>
           </a:p>
         </p:txBody>
@@ -12358,7 +12358,7 @@
                 </a:solidFill>
                 <a:latin typeface="Microsoft YaHei"/>
               </a:rPr>
-              <a:t>隐盾安全智能体 · V3.6.19</a:t>
+              <a:t>隐盾安全智能体 · V3.6.20</a:t>
             </a:r>
           </a:p>
         </p:txBody>
